--- a/docs/tcc/poster/Poster_Psike_TCC.pptx
+++ b/docs/tcc/poster/Poster_Psike_TCC.pptx
@@ -3079,7 +3079,14 @@
             <a:pPr algn="just"/>
             <a:r>
               <a:rPr lang="pt-BR" sz="3200" dirty="0" err="1"/>
-              <a:t>Na maioria das organizações esse ciclo ainda é feito em papel ou planilhas avulsas, com baixa rastreabilidade e alto custo. No setor de distribuição de energia elétrica, os fatores psicossociais (pressão por restabelecimento, turnos, sobreaviso, risco de acidente grave) convivem com riscos regulados pela NR-10 e pela NR-35.</a:t>
+              <a:t>A urgência é reforçada pelo reconhecimento da síndrome de burnout como doença ocupacional na CID-11 (código QD85), adotada oficialmente no Brasil a partir de 2025, e pelo crescimento dos afastamentos por saúde mental (TREML et al., 2025; ANAMT, 2026).</a:t>
+            </a:r>
+          </a:p>
+          <a:p>
+            <a:pPr algn="just"/>
+            <a:r>
+              <a:rPr lang="pt-BR" sz="3200" dirty="0" err="1"/>
+              <a:t>Na maioria das organizações esse ciclo ainda é feito em papel ou planilhas avulsas, com baixa rastreabilidade e alto custo. No setor de distribuição de energia elétrica, os fatores psicossociais (pressão por restabelecimento, turnos, sobreaviso, risco de acidente grave) convivem com riscos regulados pela NR-10 e pela NR-35 (SOUZA et al., 2010).</a:t>
             </a:r>
           </a:p>
           <a:p>
@@ -3133,13 +3140,13 @@
           <a:p>
             <a:r>
               <a:rPr lang="pt-BR" sz="3200" dirty="0" err="1"/>
-              <a:t>A aplicação piloto foi conduzida em [PREENCHER: empresa/unidade do setor de distribuição de energia], no período de [PREENCHER: período], com [PREENCHER: número] trabalhadores dos setores de [PREENCHER: setores].</a:t>
+              <a:t>A aplicação piloto foi conduzida em uma organização do setor de distribuição de energia elétrica, preservada em anonimato, no período de [PREENCHER: período], com [PREENCHER: número] trabalhadores dos setores de [PREENCHER: setores]. Não se coletam dados que identifiquem a organização ou as pessoas.</a:t>
             </a:r>
           </a:p>
           <a:p>
             <a:r>
               <a:rPr lang="pt-BR" sz="3200" dirty="0" err="1"/>
-              <a:t>O link da avaliação anônima foi distribuído por [PREENCHER: canal — ex.: QR code em DDS], precedido de comunicação sobre o caráter voluntário e anônimo da participação.</a:t>
+              <a:t>O link da avaliação anônima foi distribuído por [PREENCHER: canal — ex.: QR code em DDS], precedido de comunicação sobre o caráter voluntário e anônimo da participação, em conformidade com a LGPD.</a:t>
             </a:r>
           </a:p>
           <a:p>
@@ -3391,14 +3398,21 @@
             <a:pPr algn="just"/>
             <a:r>
               <a:rPr lang="pt-BR" sz="2800" dirty="0" err="1"/>
-              <a:t>BRASIL. NR-17 — Ergonomia. Redação da Portaria MTP nº 423/2021.</a:t>
+              <a:t>ISO 45003:2021 — Psychological health and safety at work.</a:t>
             </a:r>
           </a:p>
           <a:p>
             <a:pPr algn="just"/>
             <a:r>
               <a:rPr lang="pt-BR" sz="2800" dirty="0" err="1"/>
-              <a:t>ISO 45003:2021 — Occupational health and safety — Psychological health and safety at work.</a:t>
+              <a:t>SOUZA, S. F. et al. Fatores psicossociais do trabalho e transtornos mentais comuns em eletricitários. Rev. Saúde Pública, v. 44, n. 4, 2010.</a:t>
+            </a:r>
+          </a:p>
+          <a:p>
+            <a:pPr algn="just"/>
+            <a:r>
+              <a:rPr lang="pt-BR" sz="2800" dirty="0" err="1"/>
+              <a:t>TREML, M. F. Q. et al. Burnout syndrome in Brazil (2014–2024). Rev. Bras. Medicina do Trabalho, 2025.</a:t>
             </a:r>
           </a:p>
           <a:p>
@@ -3455,7 +3469,7 @@
             <a:pPr algn="ctr"/>
             <a:r>
               <a:rPr lang="pt-BR" sz="5400" dirty="0"/>
-              <a:t>[PREENCHER: e-mail]  ·  Orientador(a): [PREENCHER: nome]</a:t>
+              <a:t>[PREENCHER: e-mail]  ·  Supervisão: [PREENCHER: nome]  ·  Apoio: CERPRO</a:t>
             </a:r>
           </a:p>
         </p:txBody>

--- a/docs/tcc/poster/Poster_Psike_TCC.pptx
+++ b/docs/tcc/poster/Poster_Psike_TCC.pptx
@@ -3072,28 +3072,28 @@
             <a:pPr algn="just"/>
             <a:r>
               <a:rPr lang="pt-BR" sz="3200" dirty="0" err="1"/>
-              <a:t>A Portaria MTE nº 1.419/2024 atualizou a NR-1 para exigir, de todo empregador CLT, a identificação, a avaliação e a documentação dos fatores de risco psicossocial relacionados ao trabalho dentro do Gerenciamento de Riscos Ocupacionais (GRO) e do PGR, com exigibilidade a partir de 26 de maio de 2026.</a:t>
+              <a:t>A NR-1 exige que o empregador analise os acidentes e as doenças relacionadas ao trabalho, identifique suas causas e realimente o PGR (GRO). Na prática, o registro segue manual e tardio, a investigação para no “ato inseguro” e os quase acidentes raramente são reportados.</a:t>
             </a:r>
           </a:p>
           <a:p>
             <a:pPr algn="just"/>
             <a:r>
               <a:rPr lang="pt-BR" sz="3200" dirty="0" err="1"/>
-              <a:t>A urgência é reforçada pelo reconhecimento da síndrome de burnout como doença ocupacional na CID-11 (código QD85), adotada oficialmente no Brasil a partir de 2025, e pelo crescimento dos afastamentos por saúde mental (TREML et al., 2025; ANAMT, 2026).</a:t>
+              <a:t>No setor elétrico a gravidade é extrema: 2.089 acidentes de origem elétrica no Brasil em 2023, com 781 óbitos (ABRACOPEL, 2024); 250 mortes envolvendo a rede de distribuição (ABRADEE, 2024). Cada ocorrência — e cada quase acidente — é aprendizado que não pode ser desperdiçado.</a:t>
             </a:r>
           </a:p>
           <a:p>
             <a:pPr algn="just"/>
             <a:r>
               <a:rPr lang="pt-BR" sz="3200" dirty="0" err="1"/>
-              <a:t>Na maioria das organizações esse ciclo ainda é feito em papel ou planilhas avulsas, com baixa rastreabilidade e alto custo. No setor de distribuição de energia elétrica, os fatores psicossociais (pressão por restabelecimento, turnos, sobreaviso, risco de acidente grave) convivem com riscos regulados pela NR-10 e pela NR-35 (SOUZA et al., 2010).</a:t>
+              <a:t>A literatura brasileira consolidou o método da árvore de causas como antídoto à investigação culpabilizadora, revelando os fatores gerenciais e organizacionais na gênese dos acidentes (BINDER; ALMEIDA, 1997).</a:t>
             </a:r>
           </a:p>
           <a:p>
             <a:pPr algn="just"/>
             <a:r>
               <a:rPr lang="pt-BR" sz="3200" dirty="0" err="1"/>
-              <a:t>Objetivo: desenvolver e aplicar uma plataforma digital de baixo custo para operacionalizar a gestão de riscos psicossociais conforme a NR-1, integrada a outros processos de SST sobre a mesma base de dados.</a:t>
+              <a:t>Objetivo: desenvolver e aplicar um sistema digital de registro e investigação de acidentes e quase acidentes estruturado no método da árvore de causas, integrado ao GRO/PGR da NR-1, em uma organização de distribuição de energia elétrica.</a:t>
             </a:r>
           </a:p>
         </p:txBody>
@@ -3140,19 +3140,19 @@
           <a:p>
             <a:r>
               <a:rPr lang="pt-BR" sz="3200" dirty="0" err="1"/>
-              <a:t>A aplicação piloto foi conduzida em uma organização do setor de distribuição de energia elétrica, preservada em anonimato, no período de [PREENCHER: período], com [PREENCHER: número] trabalhadores dos setores de [PREENCHER: setores]. Não se coletam dados que identifiquem a organização ou as pessoas.</a:t>
+              <a:t>Organização do setor de distribuição de energia elétrica, preservada em anonimato. Parte documental: [PREENCHER: número] ocorrências históricas anonimizadas reinvestigadas com o roteiro de 3 níveis, comparando a profundidade causal com a análise original.</a:t>
             </a:r>
           </a:p>
           <a:p>
             <a:r>
               <a:rPr lang="pt-BR" sz="3200" dirty="0" err="1"/>
-              <a:t>O link da avaliação anônima foi distribuído por [PREENCHER: canal — ex.: QR code em DDS], precedido de comunicação sobre o caráter voluntário e anônimo da participação, em conformidade com a LGPD.</a:t>
+              <a:t>Parte de campo: piloto no período de [PREENCHER: período], com as equipes de [PREENCHER: escopo] registrando novas ocorrências e condições inseguras no local, pelo celular.</a:t>
             </a:r>
           </a:p>
           <a:p>
             <a:r>
               <a:rPr lang="pt-BR" sz="3200" dirty="0" err="1"/>
-              <a:t>As permissões de trabalho (Módulo 2) foram testadas em campo em atividades de [PREENCHER: ex.: manutenção de rede desenergizada / linha viva / trabalho em altura em postes], com checklist, geolocalização e assinatura digital.</a:t>
+              <a:t>Nenhum caso identifica pessoas, datas exatas ou locais; os exemplos são descritos com função genérica e circunstâncias descaracterizadas.</a:t>
             </a:r>
           </a:p>
         </p:txBody>
@@ -3201,28 +3201,28 @@
             <a:pPr algn="just"/>
             <a:r>
               <a:rPr lang="pt-BR" sz="3200" dirty="0" err="1"/>
-              <a:t>Pesquisa aplicada, de natureza tecnológica: desenvolvimento de um artefato (a plataforma Psike) seguido de estudo de caso com aplicação piloto.</a:t>
+              <a:t>Pesquisa aplicada, de natureza tecnológica: desenvolvimento de artefato (o sistema digital, módulo central da plataforma Psike) seguido de estudo de caso — análise documental retrospectiva de ocorrências anonimizadas e piloto de campo.</a:t>
             </a:r>
           </a:p>
           <a:p>
             <a:pPr algn="just"/>
             <a:r>
               <a:rPr lang="pt-BR" sz="3200" dirty="0" err="1"/>
-              <a:t>Arquitetura de custo zero: frontend em página web autocontida (sem instalação) e backend gratuito em Google Apps Script/Sheets como repositório único. Coleta anônima por construção, em conformidade com a LGPD.</a:t>
+              <a:t>Arquitetura de custo zero: frontend em página web autocontida (sem instalação, uso no celular em campo) e backend gratuito em nuvem como repositório único. Tratamento de dados anonimizado, conforme a LGPD.</a:t>
             </a:r>
           </a:p>
           <a:p>
             <a:pPr algn="just"/>
             <a:r>
               <a:rPr lang="pt-BR" sz="3200" dirty="0" err="1"/>
-              <a:t>Instrumento de avaliação: 10 itens em 6 dimensões (carga e ritmo; autonomia e controle; clareza de papel; apoio social e de liderança; reconhecimento; assédio e violência), em escala Likert de 5 pontos, com classificação automática do risco por dimensão em três faixas.</a:t>
+              <a:t>Registro em campo em menos de 5 minutos: classificação (acidente com/sem afastamento, quase acidente, condição insegura), descrição, tarefa e alerta automático de CAT. Investigação guiada em 3 níveis de causas: imediatas → subjacentes → básicas — o formulário não permite concluir só com causas imediatas.</a:t>
             </a:r>
           </a:p>
           <a:p>
             <a:pPr algn="just"/>
             <a:r>
               <a:rPr lang="pt-BR" sz="3200" dirty="0" err="1"/>
-              <a:t>A plataforma reúne quatro módulos sobre a mesma base: (1) riscos psicossociais (NR-1/ISO 45003); (2) permissão de trabalho para redes de distribuição (NR-10/NR-35); (3) Avaliação Ergonômica Preliminar (NR-17); (4) registro e investigação de acidentes e quase acidentes.</a:t>
+              <a:t>Ações corretivas/preventivas com responsável e prazo; indicadores automáticos: razão quase acidentes/acidentes, tempo evento–registro, ações no prazo e taxas de frequência e gravidade (NBR 14280). Módulos complementares na mesma base: permissão de trabalho (NR-10/NR-35), fatores psicossociais (NR-1) e AEP (NR-17).</a:t>
             </a:r>
           </a:p>
         </p:txBody>
@@ -3269,19 +3269,19 @@
           <a:p>
             <a:r>
               <a:rPr lang="pt-BR" sz="3200" dirty="0" err="1"/>
-              <a:t>A plataforma foi implementada integralmente, com os quatro módulos operacionais. O fluxo do Módulo 1 — da resposta anônima no celular ao texto pronto para o Inventário de Riscos Ocupacionais (IRO) — ocorre sem qualquer tabulação manual, a custo de operação nulo.</a:t>
+              <a:t>O sistema foi implementado integralmente e está operacional: registro no local, investigação em 3 níveis, ações e indicadores atualizados sem transcrição manual, a custo de operação nulo.</a:t>
             </a:r>
           </a:p>
           <a:p>
             <a:r>
               <a:rPr lang="pt-BR" sz="3200" dirty="0" err="1"/>
-              <a:t>[PREENCHER: inserir os resultados reais — nº de respondentes, taxa de adesão, nota média e faixa de risco por dimensão. Substituir as figuras de exemplo ao lado pelo gráfico do painel por dimensão e por telas do app.]</a:t>
+              <a:t>[PREENCHER: inserir resultados reais — distribuição de causas por nível (análise original × estruturada), volume de quase acidentes reportados no piloto, razão QA/acidentes e tempo evento–registro. Substituir as figuras pelo gráfico do painel e telas do módulo.]</a:t>
             </a:r>
           </a:p>
           <a:p>
             <a:r>
               <a:rPr lang="pt-BR" sz="3200" dirty="0" err="1"/>
-              <a:t>Discussão: a principal barreira à conformidade com a nova NR-1 é operacional, não conceitual. A digitalização de ponta a ponta reduziu o custo do ciclo e melhorou o anonimato, a consistência da classificação e a rastreabilidade dos registros exigida pela norma.</a:t>
+              <a:t>Discussão: quando o instrumento obriga a progressão até as causas básicas, a investigação alcança os fatores organizacionais que a análise tradicional não vê (BINDER; ALMEIDA, 1997; REASON, 1997) — e o reporte fácil de quase acidentes captura a base da pirâmide de eventos que antecede a lesão grave (HEINRICH, 1931; BIRD; GERMAIN, 1985).</a:t>
             </a:r>
           </a:p>
         </p:txBody>
@@ -3329,14 +3329,14 @@
             <a:pPr algn="just"/>
             <a:r>
               <a:rPr lang="pt-BR" sz="3200" dirty="0" err="1"/>
-              <a:t>A digitalização viabiliza o cumprimento da NR-1 quanto aos fatores psicossociais mesmo em organizações com equipes de SST enxutas, a custo praticamente nulo, e transforma o inventário de riscos em um documento vivo, alimentado pelos próprios processos operacionais.</a:t>
+              <a:t>A digitalização do ciclo registro–investigação–ação torna exequível, a custo praticamente nulo, a exigência da NR-1 de analisar ocorrências e realimentar o PGR — deslocando a análise da culpabilização individual para os fatores organizacionais e reduzindo a subnotificação de quase acidentes.</a:t>
             </a:r>
           </a:p>
           <a:p>
             <a:pPr algn="just"/>
             <a:r>
               <a:rPr lang="pt-BR" sz="3200" dirty="0" err="1"/>
-              <a:t>Trabalhos futuros: validação psicométrica do instrumento com amostras maiores, calibração dos pontos de corte com séries históricas, autenticação e segregação de dados por empresa e acompanhamento longitudinal da eficácia das medidas de controle.</a:t>
+              <a:t>Trabalhos futuros: diagrama completo da árvore de causas no software, autenticação e segregação por organização, acompanhamento longitudinal dos indicadores e cruzamento analítico entre ocorrências, permissões de trabalho e sinalização psicossocial.</a:t>
             </a:r>
           </a:p>
         </p:txBody>
@@ -3384,42 +3384,42 @@
             <a:pPr algn="just"/>
             <a:r>
               <a:rPr lang="pt-BR" sz="2800" dirty="0" err="1"/>
-              <a:t>BRASIL. NR-1 — Disposições gerais e gerenciamento de riscos ocupacionais. Redação da Portaria MTE nº 1.419/2024.</a:t>
+              <a:t>ABRACOPEL. Anuário Estatístico de Acidentes de Origem Elétrica 2024 (ano-base 2023). Salto, 2024.</a:t>
             </a:r>
           </a:p>
           <a:p>
             <a:pPr algn="just"/>
             <a:r>
               <a:rPr lang="pt-BR" sz="2800" dirty="0" err="1"/>
-              <a:t>BRASIL. NR-10 — Segurança em instalações e serviços em eletricidade.</a:t>
+              <a:t>BINDER, M. C. P.; ALMEIDA, I. M. Estudo de caso de dois acidentes do trabalho investigados com o método de árvore de causas. Cad. Saúde Pública, v. 13, n. 4, 1997.</a:t>
             </a:r>
           </a:p>
           <a:p>
             <a:pPr algn="just"/>
             <a:r>
               <a:rPr lang="pt-BR" sz="2800" dirty="0" err="1"/>
-              <a:t>ISO 45003:2021 — Psychological health and safety at work.</a:t>
+              <a:t>BRASIL. NR-1 — Gerenciamento de riscos ocupacionais (Portaria MTE nº 1.419/2024).</a:t>
             </a:r>
           </a:p>
           <a:p>
             <a:pPr algn="just"/>
             <a:r>
               <a:rPr lang="pt-BR" sz="2800" dirty="0" err="1"/>
-              <a:t>SOUZA, S. F. et al. Fatores psicossociais do trabalho e transtornos mentais comuns em eletricitários. Rev. Saúde Pública, v. 44, n. 4, 2010.</a:t>
+              <a:t>ABNT. NBR 14280:2001 — Cadastro de acidente do trabalho.</a:t>
             </a:r>
           </a:p>
           <a:p>
             <a:pPr algn="just"/>
             <a:r>
               <a:rPr lang="pt-BR" sz="2800" dirty="0" err="1"/>
-              <a:t>TREML, M. F. Q. et al. Burnout syndrome in Brazil (2014–2024). Rev. Bras. Medicina do Trabalho, 2025.</a:t>
+              <a:t>REASON, J. Managing the risks of organizational accidents. Ashgate, 1997.</a:t>
             </a:r>
           </a:p>
           <a:p>
             <a:pPr algn="just"/>
             <a:r>
               <a:rPr lang="pt-BR" sz="2800" dirty="0" err="1"/>
-              <a:t>WHO. Guidelines on mental health at work. Geneva, 2022.</a:t>
+              <a:t>HEINRICH, H. W. Industrial accident prevention. McGraw-Hill, 1931.</a:t>
             </a:r>
           </a:p>
         </p:txBody>
@@ -3455,7 +3455,7 @@
             <a:pPr algn="ctr"/>
             <a:r>
               <a:rPr lang="pt-BR" sz="6600" dirty="0"/>
-              <a:t>GESTÃO DIGITAL DE RISCOS PSICOSSOCIAIS CONFORME A NR-1: plataforma de SST aplicada à distribuição de energia elétrica</a:t>
+              <a:t>SISTEMA DIGITAL DE INVESTIGAÇÃO DE ACIDENTES PELA ÁRVORE DE CAUSAS: registro de ocorrências integrado à NR-1 na distribuição de energia elétrica</a:t>
             </a:r>
           </a:p>
           <a:p>
